--- a/docs/knova-walkthrough.pptx
+++ b/docs/knova-walkthrough.pptx
@@ -6907,7 +6907,7 @@
                 <a:ea typeface="Courier New" pitchFamily="34" charset="-122"/>
                 <a:cs typeface="Courier New" pitchFamily="34" charset="-120"/>
               </a:rPr>
-              <a:t>8 × 2  PASS</a:t>
+              <a:t>10 × 2  PASS</a:t>
             </a:r>
             <a:endParaRPr lang="en-US" sz="1250" dirty="0"/>
           </a:p>
